--- a/BirdBot.git.ignore/BirdBot-Poster.2nd.intento.pptx
+++ b/BirdBot.git.ignore/BirdBot-Poster.2nd.intento.pptx
@@ -6606,107 +6606,6 @@
       </p:sp>
       <p:sp>
         <p:nvSpPr>
-          <p:cNvPr id="58" name="Rectángulo 57"/>
-          <p:cNvSpPr/>
-          <p:nvPr/>
-        </p:nvSpPr>
-        <p:spPr>
-          <a:xfrm>
-            <a:off x="25822058" y="38946550"/>
-            <a:ext cx="9820584" cy="769441"/>
-          </a:xfrm>
-          <a:prstGeom prst="rect">
-            <a:avLst/>
-          </a:prstGeom>
-        </p:spPr>
-        <p:txBody>
-          <a:bodyPr wrap="square">
-            <a:spAutoFit/>
-          </a:bodyPr>
-          <a:lstStyle/>
-          <a:p>
-            <a:pPr algn="r"/>
-            <a:r>
-              <a:rPr lang="es-ES" sz="4400" spc="-300" dirty="0">
-                <a:solidFill>
-                  <a:prstClr val="black"/>
-                </a:solidFill>
-              </a:rPr>
-              <a:t>datos procedentes de cuadernos de campo, </a:t>
-            </a:r>
-            <a:endParaRPr lang="es-ES" sz="4400" spc="-300" dirty="0"/>
-          </a:p>
-        </p:txBody>
-      </p:sp>
-      <p:sp>
-        <p:nvSpPr>
-          <p:cNvPr id="59" name="Rectángulo 58"/>
-          <p:cNvSpPr/>
-          <p:nvPr/>
-        </p:nvSpPr>
-        <p:spPr>
-          <a:xfrm>
-            <a:off x="25665973" y="38283651"/>
-            <a:ext cx="9976669" cy="769441"/>
-          </a:xfrm>
-          <a:prstGeom prst="rect">
-            <a:avLst/>
-          </a:prstGeom>
-        </p:spPr>
-        <p:txBody>
-          <a:bodyPr wrap="square">
-            <a:spAutoFit/>
-          </a:bodyPr>
-          <a:lstStyle/>
-          <a:p>
-            <a:pPr algn="r"/>
-            <a:r>
-              <a:rPr lang="es-ES" sz="4400" spc="-300" dirty="0">
-                <a:solidFill>
-                  <a:prstClr val="black"/>
-                </a:solidFill>
-              </a:rPr>
-              <a:t>ahorrando tiempo y minimizando los errores </a:t>
-            </a:r>
-            <a:endParaRPr lang="es-ES" sz="4400" spc="-300" dirty="0"/>
-          </a:p>
-        </p:txBody>
-      </p:sp>
-      <p:sp>
-        <p:nvSpPr>
-          <p:cNvPr id="60" name="Rectángulo 59"/>
-          <p:cNvSpPr/>
-          <p:nvPr/>
-        </p:nvSpPr>
-        <p:spPr>
-          <a:xfrm>
-            <a:off x="27027232" y="39609449"/>
-            <a:ext cx="3996525" cy="769441"/>
-          </a:xfrm>
-          <a:prstGeom prst="rect">
-            <a:avLst/>
-          </a:prstGeom>
-        </p:spPr>
-        <p:txBody>
-          <a:bodyPr wrap="square">
-            <a:spAutoFit/>
-          </a:bodyPr>
-          <a:lstStyle/>
-          <a:p>
-            <a:pPr lvl="0" algn="r"/>
-            <a:r>
-              <a:rPr lang="es-ES" sz="4400" spc="-150" dirty="0">
-                <a:solidFill>
-                  <a:prstClr val="black"/>
-                </a:solidFill>
-              </a:rPr>
-              <a:t>de transcripción.</a:t>
-            </a:r>
-          </a:p>
-        </p:txBody>
-      </p:sp>
-      <p:sp>
-        <p:nvSpPr>
           <p:cNvPr id="61" name="Rectángulo 60"/>
           <p:cNvSpPr/>
           <p:nvPr/>
@@ -7035,6 +6934,113 @@
           </a:prstGeom>
         </p:spPr>
       </p:pic>
+      <p:sp>
+        <p:nvSpPr>
+          <p:cNvPr id="60" name="Rectángulo 59"/>
+          <p:cNvSpPr/>
+          <p:nvPr/>
+        </p:nvSpPr>
+        <p:spPr>
+          <a:xfrm>
+            <a:off x="27027233" y="39609449"/>
+            <a:ext cx="3882138" cy="769441"/>
+          </a:xfrm>
+          <a:prstGeom prst="rect">
+            <a:avLst/>
+          </a:prstGeom>
+        </p:spPr>
+        <p:txBody>
+          <a:bodyPr wrap="square">
+            <a:spAutoFit/>
+          </a:bodyPr>
+          <a:lstStyle/>
+          <a:p>
+            <a:pPr lvl="0" algn="r"/>
+            <a:r>
+              <a:rPr lang="es-ES" sz="4400" spc="-150" dirty="0">
+                <a:solidFill>
+                  <a:prstClr val="black"/>
+                </a:solidFill>
+              </a:rPr>
+              <a:t>de transcripción.</a:t>
+            </a:r>
+          </a:p>
+        </p:txBody>
+      </p:sp>
+      <p:sp>
+        <p:nvSpPr>
+          <p:cNvPr id="2" name="Rectángulo 1">
+            <a:extLst>
+              <a:ext uri="{FF2B5EF4-FFF2-40B4-BE49-F238E27FC236}">
+                <a16:creationId xmlns:a16="http://schemas.microsoft.com/office/drawing/2014/main" id="{B1E6C0A4-79BD-A378-B50B-05432C6E8652}"/>
+              </a:ext>
+            </a:extLst>
+          </p:cNvPr>
+          <p:cNvSpPr/>
+          <p:nvPr/>
+        </p:nvSpPr>
+        <p:spPr>
+          <a:xfrm>
+            <a:off x="25833782" y="38278340"/>
+            <a:ext cx="9820584" cy="769441"/>
+          </a:xfrm>
+          <a:prstGeom prst="rect">
+            <a:avLst/>
+          </a:prstGeom>
+        </p:spPr>
+        <p:txBody>
+          <a:bodyPr wrap="square">
+            <a:spAutoFit/>
+          </a:bodyPr>
+          <a:lstStyle/>
+          <a:p>
+            <a:pPr algn="r"/>
+            <a:r>
+              <a:rPr lang="es-ES" sz="4400" spc="-300" dirty="0">
+                <a:solidFill>
+                  <a:prstClr val="black"/>
+                </a:solidFill>
+              </a:rPr>
+              <a:t>datos  procedentes  de  cuadernos  de  campo, </a:t>
+            </a:r>
+            <a:endParaRPr lang="es-ES" sz="4400" spc="-300" dirty="0"/>
+          </a:p>
+        </p:txBody>
+      </p:sp>
+      <p:sp>
+        <p:nvSpPr>
+          <p:cNvPr id="59" name="Rectángulo 58"/>
+          <p:cNvSpPr/>
+          <p:nvPr/>
+        </p:nvSpPr>
+        <p:spPr>
+          <a:xfrm>
+            <a:off x="25665973" y="38940139"/>
+            <a:ext cx="9976669" cy="769441"/>
+          </a:xfrm>
+          <a:prstGeom prst="rect">
+            <a:avLst/>
+          </a:prstGeom>
+        </p:spPr>
+        <p:txBody>
+          <a:bodyPr wrap="square">
+            <a:spAutoFit/>
+          </a:bodyPr>
+          <a:lstStyle/>
+          <a:p>
+            <a:pPr algn="r"/>
+            <a:r>
+              <a:rPr lang="es-ES" sz="4400" spc="-300" dirty="0">
+                <a:solidFill>
+                  <a:prstClr val="black"/>
+                </a:solidFill>
+              </a:rPr>
+              <a:t>ahorrando tiempo y minimizando los errores </a:t>
+            </a:r>
+            <a:endParaRPr lang="es-ES" sz="4400" spc="-300" dirty="0"/>
+          </a:p>
+        </p:txBody>
+      </p:sp>
     </p:spTree>
     <p:extLst>
       <p:ext uri="{BB962C8B-B14F-4D97-AF65-F5344CB8AC3E}">
